--- a/p03/A-frame-Boolean-operations.pptx
+++ b/p03/A-frame-Boolean-operations.pptx
@@ -5154,8 +5154,12 @@
               <a:buNone/>
             </a:pPr>
             <a:r>
+              <a:rPr lang="en-US" b="1" dirty="0"/>
+              <a:t>RGB</a:t>
+            </a:r>
+            <a:r>
               <a:rPr lang="en-US" dirty="0"/>
-              <a:t>RGB for screens – </a:t>
+              <a:t> for screens – </a:t>
             </a:r>
             <a:r>
               <a:rPr lang="en-US" b="1" dirty="0">
@@ -5181,8 +5185,12 @@
               <a:buNone/>
             </a:pPr>
             <a:r>
+              <a:rPr lang="en-US" b="1" dirty="0"/>
+              <a:t>CMYK</a:t>
+            </a:r>
+            <a:r>
               <a:rPr lang="en-US" dirty="0"/>
-              <a:t>CMYK for physical color printing like paper – </a:t>
+              <a:t> for physical color printing like paper – </a:t>
             </a:r>
             <a:r>
               <a:rPr lang="en-US" b="1" dirty="0">
